--- a/make_presentation/templates/templates/creative/no_logo_11.pptx
+++ b/make_presentation/templates/templates/creative/no_logo_11.pptx
@@ -77,19 +77,7 @@
               <a:rPr b="0" lang="en-US" sz="4400" spc="-1" strike="noStrike">
                 <a:latin typeface="Arial"/>
               </a:rPr>
-              <a:t>Click to </a:t>
-            </a:r>
-            <a:r>
-              <a:rPr b="0" lang="en-US" sz="4400" spc="-1" strike="noStrike">
-                <a:latin typeface="Arial"/>
-              </a:rPr>
-              <a:t>move </a:t>
-            </a:r>
-            <a:r>
-              <a:rPr b="0" lang="en-US" sz="4400" spc="-1" strike="noStrike">
-                <a:latin typeface="Arial"/>
-              </a:rPr>
-              <a:t>the slide</a:t>
+              <a:t>Click to move the slide</a:t>
             </a:r>
             <a:endParaRPr b="0" lang="en-US" sz="4400" spc="-1" strike="noStrike">
               <a:latin typeface="Arial"/>
@@ -129,13 +117,7 @@
               <a:rPr b="0" lang="en-US" sz="2000" spc="-1" strike="noStrike">
                 <a:latin typeface="Arial"/>
               </a:rPr>
-              <a:t>Click to edit the </a:t>
-            </a:r>
-            <a:r>
-              <a:rPr b="0" lang="en-US" sz="2000" spc="-1" strike="noStrike">
-                <a:latin typeface="Arial"/>
-              </a:rPr>
-              <a:t>notes format</a:t>
+              <a:t>Click to edit the notes format</a:t>
             </a:r>
             <a:endParaRPr b="0" lang="en-US" sz="2000" spc="-1" strike="noStrike">
               <a:latin typeface="Arial"/>
@@ -320,7 +302,7 @@
             <a:pPr algn="r">
               <a:buNone/>
             </a:pPr>
-            <a:fld id="{41EB3D1B-E029-4102-9166-AA9C888CE77F}" type="slidenum">
+            <a:fld id="{3A07D297-01D6-43EF-AD49-A69474A5E5BC}" type="slidenum">
               <a:rPr b="0" lang="en-US" sz="1400" spc="-1" strike="noStrike">
                 <a:latin typeface="Times New Roman"/>
               </a:rPr>
@@ -368,7 +350,7 @@
         <p:spPr>
           <a:xfrm>
             <a:off x="685800" y="1143000"/>
-            <a:ext cx="5485680" cy="3085560"/>
+            <a:ext cx="5485320" cy="3085200"/>
           </a:xfrm>
           <a:prstGeom prst="rect">
             <a:avLst/>
@@ -391,7 +373,7 @@
         <p:spPr>
           <a:xfrm>
             <a:off x="685800" y="4400640"/>
-            <a:ext cx="5485680" cy="3599640"/>
+            <a:ext cx="5485320" cy="3599280"/>
           </a:xfrm>
           <a:prstGeom prst="rect">
             <a:avLst/>
@@ -425,7 +407,7 @@
         <p:spPr>
           <a:xfrm>
             <a:off x="3884760" y="8685360"/>
-            <a:ext cx="2971080" cy="457920"/>
+            <a:ext cx="2970720" cy="457560"/>
           </a:xfrm>
           <a:prstGeom prst="rect">
             <a:avLst/>
@@ -457,7 +439,7 @@
               </a:lnSpc>
               <a:buNone/>
             </a:pPr>
-            <a:fld id="{701911A1-EDD5-40D3-91B9-AD173B1FBBBF}" type="slidenum">
+            <a:fld id="{25B05118-7EF4-4FC9-AC7C-D5A242F0FD55}" type="slidenum">
               <a:rPr b="0" lang="ru-RU" sz="1200" spc="-1" strike="noStrike">
                 <a:latin typeface="Times New Roman"/>
               </a:rPr>
@@ -504,7 +486,7 @@
         <p:spPr>
           <a:xfrm>
             <a:off x="685800" y="1143000"/>
-            <a:ext cx="5485680" cy="3085560"/>
+            <a:ext cx="5485320" cy="3085200"/>
           </a:xfrm>
           <a:prstGeom prst="rect">
             <a:avLst/>
@@ -527,7 +509,7 @@
         <p:spPr>
           <a:xfrm>
             <a:off x="685800" y="4400640"/>
-            <a:ext cx="5485680" cy="3599640"/>
+            <a:ext cx="5485320" cy="3599280"/>
           </a:xfrm>
           <a:prstGeom prst="rect">
             <a:avLst/>
@@ -561,7 +543,7 @@
         <p:spPr>
           <a:xfrm>
             <a:off x="3884760" y="8685360"/>
-            <a:ext cx="2971080" cy="457920"/>
+            <a:ext cx="2970720" cy="457560"/>
           </a:xfrm>
           <a:prstGeom prst="rect">
             <a:avLst/>
@@ -593,7 +575,7 @@
               </a:lnSpc>
               <a:buNone/>
             </a:pPr>
-            <a:fld id="{B8292FD9-B167-4393-8E97-544226947F52}" type="slidenum">
+            <a:fld id="{FD3E8B4C-5B10-432F-BCB9-6F1011317EB9}" type="slidenum">
               <a:rPr b="0" lang="ru-RU" sz="1200" spc="-1" strike="noStrike">
                 <a:latin typeface="Times New Roman"/>
               </a:rPr>
@@ -640,7 +622,7 @@
         <p:spPr>
           <a:xfrm>
             <a:off x="685800" y="1143000"/>
-            <a:ext cx="5485680" cy="3085560"/>
+            <a:ext cx="5485320" cy="3085200"/>
           </a:xfrm>
           <a:prstGeom prst="rect">
             <a:avLst/>
@@ -663,7 +645,7 @@
         <p:spPr>
           <a:xfrm>
             <a:off x="685800" y="4400640"/>
-            <a:ext cx="5485680" cy="3599640"/>
+            <a:ext cx="5485320" cy="3599280"/>
           </a:xfrm>
           <a:prstGeom prst="rect">
             <a:avLst/>
@@ -697,7 +679,7 @@
         <p:spPr>
           <a:xfrm>
             <a:off x="3884760" y="8685360"/>
-            <a:ext cx="2971080" cy="457920"/>
+            <a:ext cx="2970720" cy="457560"/>
           </a:xfrm>
           <a:prstGeom prst="rect">
             <a:avLst/>
@@ -729,7 +711,7 @@
               </a:lnSpc>
               <a:buNone/>
             </a:pPr>
-            <a:fld id="{BF479499-44A2-47AC-BBD2-11730305B9D6}" type="slidenum">
+            <a:fld id="{FB9E5F37-9A2D-46B5-8235-BD73A9294EFC}" type="slidenum">
               <a:rPr b="0" lang="ru-RU" sz="1200" spc="-1" strike="noStrike">
                 <a:latin typeface="Times New Roman"/>
               </a:rPr>
@@ -776,7 +758,7 @@
         <p:spPr>
           <a:xfrm>
             <a:off x="685800" y="1143000"/>
-            <a:ext cx="5485680" cy="3085560"/>
+            <a:ext cx="5485320" cy="3085200"/>
           </a:xfrm>
           <a:prstGeom prst="rect">
             <a:avLst/>
@@ -799,7 +781,7 @@
         <p:spPr>
           <a:xfrm>
             <a:off x="685800" y="4400640"/>
-            <a:ext cx="5485680" cy="3599640"/>
+            <a:ext cx="5485320" cy="3599280"/>
           </a:xfrm>
           <a:prstGeom prst="rect">
             <a:avLst/>
@@ -833,7 +815,7 @@
         <p:spPr>
           <a:xfrm>
             <a:off x="3884760" y="8685360"/>
-            <a:ext cx="2971080" cy="457920"/>
+            <a:ext cx="2970720" cy="457560"/>
           </a:xfrm>
           <a:prstGeom prst="rect">
             <a:avLst/>
@@ -865,7 +847,7 @@
               </a:lnSpc>
               <a:buNone/>
             </a:pPr>
-            <a:fld id="{BF798A72-254E-4A33-BA9C-E417995127BA}" type="slidenum">
+            <a:fld id="{FC0EE05A-E978-434D-B99F-4F4FF399DE29}" type="slidenum">
               <a:rPr b="0" lang="ru-RU" sz="1200" spc="-1" strike="noStrike">
                 <a:latin typeface="Times New Roman"/>
               </a:rPr>
@@ -933,7 +915,7 @@
         <p:txBody>
           <a:bodyPr/>
           <a:p>
-            <a:fld id="{A7B60E10-465F-41F9-82FC-0A4B7557BDE3}" type="slidenum">
+            <a:fld id="{5A147E40-D35C-4831-98D5-64F66AF3DA54}" type="slidenum">
               <a:t>&lt;#&gt;</a:t>
             </a:fld>
           </a:p>
@@ -995,7 +977,7 @@
         <p:spPr>
           <a:xfrm>
             <a:off x="1143000" y="841680"/>
-            <a:ext cx="6857280" cy="1789920"/>
+            <a:ext cx="6856920" cy="1789560"/>
           </a:xfrm>
           <a:prstGeom prst="rect">
             <a:avLst/>
@@ -1032,7 +1014,7 @@
         <p:spPr>
           <a:xfrm>
             <a:off x="457200" y="1203480"/>
-            <a:ext cx="8229240" cy="1422720"/>
+            <a:ext cx="8228880" cy="1422360"/>
           </a:xfrm>
           <a:prstGeom prst="rect">
             <a:avLst/>
@@ -1065,8 +1047,8 @@
         </p:nvSpPr>
         <p:spPr>
           <a:xfrm>
-            <a:off x="457200" y="2761920"/>
-            <a:ext cx="8229240" cy="1422720"/>
+            <a:off x="457200" y="2761200"/>
+            <a:ext cx="8228880" cy="1422360"/>
           </a:xfrm>
           <a:prstGeom prst="rect">
             <a:avLst/>
@@ -1121,7 +1103,7 @@
         <p:txBody>
           <a:bodyPr/>
           <a:p>
-            <a:fld id="{DC9B4D83-3A2C-408B-A5FA-353E8D9B2F9B}" type="slidenum">
+            <a:fld id="{762210FF-00B2-4625-8075-23E3503A4553}" type="slidenum">
               <a:t>&lt;#&gt;</a:t>
             </a:fld>
           </a:p>
@@ -1183,7 +1165,7 @@
         <p:spPr>
           <a:xfrm>
             <a:off x="1143000" y="841680"/>
-            <a:ext cx="6857280" cy="1789920"/>
+            <a:ext cx="6856920" cy="1789560"/>
           </a:xfrm>
           <a:prstGeom prst="rect">
             <a:avLst/>
@@ -1220,7 +1202,7 @@
         <p:spPr>
           <a:xfrm>
             <a:off x="457200" y="1203480"/>
-            <a:ext cx="4015800" cy="1422720"/>
+            <a:ext cx="4015440" cy="1422360"/>
           </a:xfrm>
           <a:prstGeom prst="rect">
             <a:avLst/>
@@ -1253,8 +1235,8 @@
         </p:nvSpPr>
         <p:spPr>
           <a:xfrm>
-            <a:off x="4674240" y="1203480"/>
-            <a:ext cx="4015800" cy="1422720"/>
+            <a:off x="4673880" y="1203480"/>
+            <a:ext cx="4015440" cy="1422360"/>
           </a:xfrm>
           <a:prstGeom prst="rect">
             <a:avLst/>
@@ -1287,8 +1269,8 @@
         </p:nvSpPr>
         <p:spPr>
           <a:xfrm>
-            <a:off x="457200" y="2761920"/>
-            <a:ext cx="4015800" cy="1422720"/>
+            <a:off x="457200" y="2761200"/>
+            <a:ext cx="4015440" cy="1422360"/>
           </a:xfrm>
           <a:prstGeom prst="rect">
             <a:avLst/>
@@ -1321,8 +1303,8 @@
         </p:nvSpPr>
         <p:spPr>
           <a:xfrm>
-            <a:off x="4674240" y="2761920"/>
-            <a:ext cx="4015800" cy="1422720"/>
+            <a:off x="4673880" y="2761200"/>
+            <a:ext cx="4015440" cy="1422360"/>
           </a:xfrm>
           <a:prstGeom prst="rect">
             <a:avLst/>
@@ -1377,7 +1359,7 @@
         <p:txBody>
           <a:bodyPr/>
           <a:p>
-            <a:fld id="{AE9D9F48-F3FE-4BC7-8405-21AFD8CD119F}" type="slidenum">
+            <a:fld id="{DF265E1E-149C-4D68-AC04-5A48241CE2B7}" type="slidenum">
               <a:t>&lt;#&gt;</a:t>
             </a:fld>
           </a:p>
@@ -1439,7 +1421,7 @@
         <p:spPr>
           <a:xfrm>
             <a:off x="1143000" y="841680"/>
-            <a:ext cx="6857280" cy="1789920"/>
+            <a:ext cx="6856920" cy="1789560"/>
           </a:xfrm>
           <a:prstGeom prst="rect">
             <a:avLst/>
@@ -1476,7 +1458,7 @@
         <p:spPr>
           <a:xfrm>
             <a:off x="457200" y="1203480"/>
-            <a:ext cx="2649600" cy="1422720"/>
+            <a:ext cx="2649600" cy="1422360"/>
           </a:xfrm>
           <a:prstGeom prst="rect">
             <a:avLst/>
@@ -1510,7 +1492,7 @@
         <p:spPr>
           <a:xfrm>
             <a:off x="3239640" y="1203480"/>
-            <a:ext cx="2649600" cy="1422720"/>
+            <a:ext cx="2649600" cy="1422360"/>
           </a:xfrm>
           <a:prstGeom prst="rect">
             <a:avLst/>
@@ -1544,7 +1526,7 @@
         <p:spPr>
           <a:xfrm>
             <a:off x="6022080" y="1203480"/>
-            <a:ext cx="2649600" cy="1422720"/>
+            <a:ext cx="2649600" cy="1422360"/>
           </a:xfrm>
           <a:prstGeom prst="rect">
             <a:avLst/>
@@ -1577,8 +1559,8 @@
         </p:nvSpPr>
         <p:spPr>
           <a:xfrm>
-            <a:off x="457200" y="2761920"/>
-            <a:ext cx="2649600" cy="1422720"/>
+            <a:off x="457200" y="2761200"/>
+            <a:ext cx="2649600" cy="1422360"/>
           </a:xfrm>
           <a:prstGeom prst="rect">
             <a:avLst/>
@@ -1611,8 +1593,8 @@
         </p:nvSpPr>
         <p:spPr>
           <a:xfrm>
-            <a:off x="3239640" y="2761920"/>
-            <a:ext cx="2649600" cy="1422720"/>
+            <a:off x="3239640" y="2761200"/>
+            <a:ext cx="2649600" cy="1422360"/>
           </a:xfrm>
           <a:prstGeom prst="rect">
             <a:avLst/>
@@ -1645,8 +1627,8 @@
         </p:nvSpPr>
         <p:spPr>
           <a:xfrm>
-            <a:off x="6022080" y="2761920"/>
-            <a:ext cx="2649600" cy="1422720"/>
+            <a:off x="6022080" y="2761200"/>
+            <a:ext cx="2649600" cy="1422360"/>
           </a:xfrm>
           <a:prstGeom prst="rect">
             <a:avLst/>
@@ -1701,7 +1683,7 @@
         <p:txBody>
           <a:bodyPr/>
           <a:p>
-            <a:fld id="{238F2F87-61E6-4109-9928-D016E99C9C10}" type="slidenum">
+            <a:fld id="{0A46B0A0-9BF2-4C31-9999-56FC41175DD5}" type="slidenum">
               <a:t>&lt;#&gt;</a:t>
             </a:fld>
           </a:p>
@@ -1763,7 +1745,7 @@
         <p:spPr>
           <a:xfrm>
             <a:off x="1143000" y="841680"/>
-            <a:ext cx="6857280" cy="1789920"/>
+            <a:ext cx="6856920" cy="1789560"/>
           </a:xfrm>
           <a:prstGeom prst="rect">
             <a:avLst/>
@@ -1800,7 +1782,7 @@
         <p:spPr>
           <a:xfrm>
             <a:off x="457200" y="1203480"/>
-            <a:ext cx="8229240" cy="2982960"/>
+            <a:ext cx="8228880" cy="2982600"/>
           </a:xfrm>
           <a:prstGeom prst="rect">
             <a:avLst/>
@@ -1858,7 +1840,7 @@
         <p:txBody>
           <a:bodyPr/>
           <a:p>
-            <a:fld id="{D8C72A33-5BC4-4278-90D5-75C199E43296}" type="slidenum">
+            <a:fld id="{AF2F3E18-DEB6-464C-8116-B0D548454AD0}" type="slidenum">
               <a:t>&lt;#&gt;</a:t>
             </a:fld>
           </a:p>
@@ -1920,7 +1902,7 @@
         <p:spPr>
           <a:xfrm>
             <a:off x="1143000" y="841680"/>
-            <a:ext cx="6857280" cy="1789920"/>
+            <a:ext cx="6856920" cy="1789560"/>
           </a:xfrm>
           <a:prstGeom prst="rect">
             <a:avLst/>
@@ -1957,7 +1939,7 @@
         <p:spPr>
           <a:xfrm>
             <a:off x="457200" y="1203480"/>
-            <a:ext cx="8229240" cy="2982960"/>
+            <a:ext cx="8228880" cy="2982600"/>
           </a:xfrm>
           <a:prstGeom prst="rect">
             <a:avLst/>
@@ -2012,7 +1994,7 @@
         <p:txBody>
           <a:bodyPr/>
           <a:p>
-            <a:fld id="{B46EBF15-9823-432C-B7C1-1A53D2BB91A5}" type="slidenum">
+            <a:fld id="{B2318FDC-35B4-4C0C-970B-CCFC07AA7E59}" type="slidenum">
               <a:t>&lt;#&gt;</a:t>
             </a:fld>
           </a:p>
@@ -2074,7 +2056,7 @@
         <p:spPr>
           <a:xfrm>
             <a:off x="1143000" y="841680"/>
-            <a:ext cx="6857280" cy="1789920"/>
+            <a:ext cx="6856920" cy="1789560"/>
           </a:xfrm>
           <a:prstGeom prst="rect">
             <a:avLst/>
@@ -2111,7 +2093,7 @@
         <p:spPr>
           <a:xfrm>
             <a:off x="457200" y="1203480"/>
-            <a:ext cx="4015800" cy="2982960"/>
+            <a:ext cx="4015440" cy="2982600"/>
           </a:xfrm>
           <a:prstGeom prst="rect">
             <a:avLst/>
@@ -2144,8 +2126,8 @@
         </p:nvSpPr>
         <p:spPr>
           <a:xfrm>
-            <a:off x="4674240" y="1203480"/>
-            <a:ext cx="4015800" cy="2982960"/>
+            <a:off x="4673880" y="1203480"/>
+            <a:ext cx="4015440" cy="2982600"/>
           </a:xfrm>
           <a:prstGeom prst="rect">
             <a:avLst/>
@@ -2200,7 +2182,7 @@
         <p:txBody>
           <a:bodyPr/>
           <a:p>
-            <a:fld id="{F0245D90-3641-420E-BEE3-1BC318A11DDD}" type="slidenum">
+            <a:fld id="{3323313B-A338-44C4-9BE9-D562531548E9}" type="slidenum">
               <a:t>&lt;#&gt;</a:t>
             </a:fld>
           </a:p>
@@ -2262,7 +2244,7 @@
         <p:spPr>
           <a:xfrm>
             <a:off x="1143000" y="841680"/>
-            <a:ext cx="6857280" cy="1789920"/>
+            <a:ext cx="6856920" cy="1789560"/>
           </a:xfrm>
           <a:prstGeom prst="rect">
             <a:avLst/>
@@ -2320,7 +2302,7 @@
         <p:txBody>
           <a:bodyPr/>
           <a:p>
-            <a:fld id="{83CED86B-ADE9-4969-B8F1-B79F23577943}" type="slidenum">
+            <a:fld id="{789173B9-0585-4B6D-97B3-37413EB44AC8}" type="slidenum">
               <a:t>&lt;#&gt;</a:t>
             </a:fld>
           </a:p>
@@ -2382,7 +2364,7 @@
         <p:spPr>
           <a:xfrm>
             <a:off x="1143000" y="841680"/>
-            <a:ext cx="6857280" cy="8298360"/>
+            <a:ext cx="6856920" cy="8296560"/>
           </a:xfrm>
           <a:prstGeom prst="rect">
             <a:avLst/>
@@ -2440,7 +2422,7 @@
         <p:txBody>
           <a:bodyPr/>
           <a:p>
-            <a:fld id="{EC4E1421-9B91-4BD5-8769-7A2261768649}" type="slidenum">
+            <a:fld id="{81EFB935-8EF2-43CB-B23D-81123DCDB7A0}" type="slidenum">
               <a:t>&lt;#&gt;</a:t>
             </a:fld>
           </a:p>
@@ -2502,7 +2484,7 @@
         <p:spPr>
           <a:xfrm>
             <a:off x="1143000" y="841680"/>
-            <a:ext cx="6857280" cy="1789920"/>
+            <a:ext cx="6856920" cy="1789560"/>
           </a:xfrm>
           <a:prstGeom prst="rect">
             <a:avLst/>
@@ -2539,7 +2521,7 @@
         <p:spPr>
           <a:xfrm>
             <a:off x="457200" y="1203480"/>
-            <a:ext cx="4015800" cy="1422720"/>
+            <a:ext cx="4015440" cy="1422360"/>
           </a:xfrm>
           <a:prstGeom prst="rect">
             <a:avLst/>
@@ -2572,8 +2554,8 @@
         </p:nvSpPr>
         <p:spPr>
           <a:xfrm>
-            <a:off x="4674240" y="1203480"/>
-            <a:ext cx="4015800" cy="2982960"/>
+            <a:off x="4673880" y="1203480"/>
+            <a:ext cx="4015440" cy="2982600"/>
           </a:xfrm>
           <a:prstGeom prst="rect">
             <a:avLst/>
@@ -2606,8 +2588,8 @@
         </p:nvSpPr>
         <p:spPr>
           <a:xfrm>
-            <a:off x="457200" y="2761920"/>
-            <a:ext cx="4015800" cy="1422720"/>
+            <a:off x="457200" y="2761200"/>
+            <a:ext cx="4015440" cy="1422360"/>
           </a:xfrm>
           <a:prstGeom prst="rect">
             <a:avLst/>
@@ -2662,7 +2644,7 @@
         <p:txBody>
           <a:bodyPr/>
           <a:p>
-            <a:fld id="{8728D9CB-2F62-47AC-81F9-EB8A750D546C}" type="slidenum">
+            <a:fld id="{09F9104D-5479-4302-B5A8-795AA0E0A6A6}" type="slidenum">
               <a:t>&lt;#&gt;</a:t>
             </a:fld>
           </a:p>
@@ -2724,7 +2706,7 @@
         <p:spPr>
           <a:xfrm>
             <a:off x="1143000" y="841680"/>
-            <a:ext cx="6857280" cy="1789920"/>
+            <a:ext cx="6856920" cy="1789560"/>
           </a:xfrm>
           <a:prstGeom prst="rect">
             <a:avLst/>
@@ -2761,7 +2743,7 @@
         <p:spPr>
           <a:xfrm>
             <a:off x="457200" y="1203480"/>
-            <a:ext cx="4015800" cy="2982960"/>
+            <a:ext cx="4015440" cy="2982600"/>
           </a:xfrm>
           <a:prstGeom prst="rect">
             <a:avLst/>
@@ -2794,8 +2776,8 @@
         </p:nvSpPr>
         <p:spPr>
           <a:xfrm>
-            <a:off x="4674240" y="1203480"/>
-            <a:ext cx="4015800" cy="1422720"/>
+            <a:off x="4673880" y="1203480"/>
+            <a:ext cx="4015440" cy="1422360"/>
           </a:xfrm>
           <a:prstGeom prst="rect">
             <a:avLst/>
@@ -2828,8 +2810,8 @@
         </p:nvSpPr>
         <p:spPr>
           <a:xfrm>
-            <a:off x="4674240" y="2761920"/>
-            <a:ext cx="4015800" cy="1422720"/>
+            <a:off x="4673880" y="2761200"/>
+            <a:ext cx="4015440" cy="1422360"/>
           </a:xfrm>
           <a:prstGeom prst="rect">
             <a:avLst/>
@@ -2884,7 +2866,7 @@
         <p:txBody>
           <a:bodyPr/>
           <a:p>
-            <a:fld id="{1AD11C95-D3F6-4B7A-B7AE-165AC6BFA1FD}" type="slidenum">
+            <a:fld id="{3B73E2C2-1707-4DFB-B58E-16058409BB28}" type="slidenum">
               <a:t>&lt;#&gt;</a:t>
             </a:fld>
           </a:p>
@@ -2946,7 +2928,7 @@
         <p:spPr>
           <a:xfrm>
             <a:off x="1143000" y="841680"/>
-            <a:ext cx="6857280" cy="1789920"/>
+            <a:ext cx="6856920" cy="1789560"/>
           </a:xfrm>
           <a:prstGeom prst="rect">
             <a:avLst/>
@@ -2983,7 +2965,7 @@
         <p:spPr>
           <a:xfrm>
             <a:off x="457200" y="1203480"/>
-            <a:ext cx="4015800" cy="1422720"/>
+            <a:ext cx="4015440" cy="1422360"/>
           </a:xfrm>
           <a:prstGeom prst="rect">
             <a:avLst/>
@@ -3016,8 +2998,8 @@
         </p:nvSpPr>
         <p:spPr>
           <a:xfrm>
-            <a:off x="4674240" y="1203480"/>
-            <a:ext cx="4015800" cy="1422720"/>
+            <a:off x="4673880" y="1203480"/>
+            <a:ext cx="4015440" cy="1422360"/>
           </a:xfrm>
           <a:prstGeom prst="rect">
             <a:avLst/>
@@ -3050,8 +3032,8 @@
         </p:nvSpPr>
         <p:spPr>
           <a:xfrm>
-            <a:off x="457200" y="2761920"/>
-            <a:ext cx="8229240" cy="1422720"/>
+            <a:off x="457200" y="2761200"/>
+            <a:ext cx="8228880" cy="1422360"/>
           </a:xfrm>
           <a:prstGeom prst="rect">
             <a:avLst/>
@@ -3106,7 +3088,7 @@
         <p:txBody>
           <a:bodyPr/>
           <a:p>
-            <a:fld id="{335E15ED-1BB7-437C-94C1-EC616595F62E}" type="slidenum">
+            <a:fld id="{E4B9F236-64C1-48AC-816C-FAD4928A6972}" type="slidenum">
               <a:t>&lt;#&gt;</a:t>
             </a:fld>
           </a:p>
@@ -3175,7 +3157,7 @@
         <p:spPr>
           <a:xfrm>
             <a:off x="1143000" y="841680"/>
-            <a:ext cx="6857280" cy="1789920"/>
+            <a:ext cx="6856920" cy="1789560"/>
           </a:xfrm>
           <a:prstGeom prst="rect">
             <a:avLst/>
@@ -3194,85 +3176,7 @@
               <a:rPr b="0" lang="en-US" sz="1800" spc="-1" strike="noStrike">
                 <a:latin typeface="Arial"/>
               </a:rPr>
-              <a:t>Cli</a:t>
-            </a:r>
-            <a:r>
-              <a:rPr b="0" lang="en-US" sz="1800" spc="-1" strike="noStrike">
-                <a:latin typeface="Arial"/>
-              </a:rPr>
-              <a:t>ck </a:t>
-            </a:r>
-            <a:r>
-              <a:rPr b="0" lang="en-US" sz="1800" spc="-1" strike="noStrike">
-                <a:latin typeface="Arial"/>
-              </a:rPr>
-              <a:t>to </a:t>
-            </a:r>
-            <a:r>
-              <a:rPr b="0" lang="en-US" sz="1800" spc="-1" strike="noStrike">
-                <a:latin typeface="Arial"/>
-              </a:rPr>
-              <a:t>edi</a:t>
-            </a:r>
-            <a:r>
-              <a:rPr b="0" lang="en-US" sz="1800" spc="-1" strike="noStrike">
-                <a:latin typeface="Arial"/>
-              </a:rPr>
-              <a:t>t </a:t>
-            </a:r>
-            <a:r>
-              <a:rPr b="0" lang="en-US" sz="1800" spc="-1" strike="noStrike">
-                <a:latin typeface="Arial"/>
-              </a:rPr>
-              <a:t>th</a:t>
-            </a:r>
-            <a:r>
-              <a:rPr b="0" lang="en-US" sz="1800" spc="-1" strike="noStrike">
-                <a:latin typeface="Arial"/>
-              </a:rPr>
-              <a:t>e </a:t>
-            </a:r>
-            <a:r>
-              <a:rPr b="0" lang="en-US" sz="1800" spc="-1" strike="noStrike">
-                <a:latin typeface="Arial"/>
-              </a:rPr>
-              <a:t>titl</a:t>
-            </a:r>
-            <a:r>
-              <a:rPr b="0" lang="en-US" sz="1800" spc="-1" strike="noStrike">
-                <a:latin typeface="Arial"/>
-              </a:rPr>
-              <a:t>e </a:t>
-            </a:r>
-            <a:r>
-              <a:rPr b="0" lang="en-US" sz="1800" spc="-1" strike="noStrike">
-                <a:latin typeface="Arial"/>
-              </a:rPr>
-              <a:t>tex</a:t>
-            </a:r>
-            <a:r>
-              <a:rPr b="0" lang="en-US" sz="1800" spc="-1" strike="noStrike">
-                <a:latin typeface="Arial"/>
-              </a:rPr>
-              <a:t>t </a:t>
-            </a:r>
-            <a:r>
-              <a:rPr b="0" lang="en-US" sz="1800" spc="-1" strike="noStrike">
-                <a:latin typeface="Arial"/>
-              </a:rPr>
-              <a:t>for</a:t>
-            </a:r>
-            <a:r>
-              <a:rPr b="0" lang="en-US" sz="1800" spc="-1" strike="noStrike">
-                <a:latin typeface="Arial"/>
-              </a:rPr>
-              <a:t>m</a:t>
-            </a:r>
-            <a:r>
-              <a:rPr b="0" lang="en-US" sz="1800" spc="-1" strike="noStrike">
-                <a:latin typeface="Arial"/>
-              </a:rPr>
-              <a:t>at</a:t>
+              <a:t>Click to edit the title text format</a:t>
             </a:r>
             <a:endParaRPr b="0" lang="en-US" sz="1800" spc="-1" strike="noStrike">
               <a:latin typeface="Arial"/>
@@ -3283,173 +3187,6 @@
       <p:sp>
         <p:nvSpPr>
           <p:cNvPr id="1" name="PlaceHolder 2"/>
-          <p:cNvSpPr>
-            <a:spLocks noGrp="1"/>
-          </p:cNvSpPr>
-          <p:nvPr>
-            <p:ph type="ftr" idx="1"/>
-          </p:nvPr>
-        </p:nvSpPr>
-        <p:spPr>
-          <a:xfrm>
-            <a:off x="3029040" y="4767120"/>
-            <a:ext cx="3085560" cy="273240"/>
-          </a:xfrm>
-          <a:prstGeom prst="rect">
-            <a:avLst/>
-          </a:prstGeom>
-          <a:noFill/>
-          <a:ln w="0">
-            <a:noFill/>
-          </a:ln>
-        </p:spPr>
-        <p:txBody>
-          <a:bodyPr lIns="90000" rIns="90000" tIns="45000" bIns="45000" anchor="ctr">
-            <a:noAutofit/>
-          </a:bodyPr>
-          <a:lstStyle>
-            <a:lvl1pPr algn="ctr">
-              <a:lnSpc>
-                <a:spcPct val="100000"/>
-              </a:lnSpc>
-              <a:buNone/>
-              <a:defRPr b="0" lang="en-US" sz="1400" spc="-1" strike="noStrike">
-                <a:latin typeface="Times New Roman"/>
-              </a:defRPr>
-            </a:lvl1pPr>
-          </a:lstStyle>
-          <a:p>
-            <a:pPr algn="ctr">
-              <a:lnSpc>
-                <a:spcPct val="100000"/>
-              </a:lnSpc>
-              <a:buNone/>
-            </a:pPr>
-            <a:r>
-              <a:rPr b="0" lang="en-US" sz="1400" spc="-1" strike="noStrike">
-                <a:latin typeface="Times New Roman"/>
-              </a:rPr>
-              <a:t>&lt;footer&gt;</a:t>
-            </a:r>
-            <a:endParaRPr b="0" lang="en-US" sz="1400" spc="-1" strike="noStrike">
-              <a:latin typeface="Times New Roman"/>
-            </a:endParaRPr>
-          </a:p>
-        </p:txBody>
-      </p:sp>
-      <p:sp>
-        <p:nvSpPr>
-          <p:cNvPr id="2" name="PlaceHolder 3"/>
-          <p:cNvSpPr>
-            <a:spLocks noGrp="1"/>
-          </p:cNvSpPr>
-          <p:nvPr>
-            <p:ph type="sldNum" idx="2"/>
-          </p:nvPr>
-        </p:nvSpPr>
-        <p:spPr>
-          <a:xfrm>
-            <a:off x="6458040" y="4767120"/>
-            <a:ext cx="2056680" cy="273240"/>
-          </a:xfrm>
-          <a:prstGeom prst="rect">
-            <a:avLst/>
-          </a:prstGeom>
-          <a:noFill/>
-          <a:ln w="0">
-            <a:noFill/>
-          </a:ln>
-        </p:spPr>
-        <p:txBody>
-          <a:bodyPr lIns="90000" rIns="90000" tIns="45000" bIns="45000" anchor="ctr">
-            <a:noAutofit/>
-          </a:bodyPr>
-          <a:lstStyle>
-            <a:lvl1pPr algn="r">
-              <a:lnSpc>
-                <a:spcPct val="100000"/>
-              </a:lnSpc>
-              <a:buNone/>
-              <a:defRPr b="0" lang="en-US" sz="900" spc="-1" strike="noStrike">
-                <a:solidFill>
-                  <a:srgbClr val="8b8b8b"/>
-                </a:solidFill>
-                <a:latin typeface="Calibri"/>
-              </a:defRPr>
-            </a:lvl1pPr>
-          </a:lstStyle>
-          <a:p>
-            <a:pPr algn="r">
-              <a:lnSpc>
-                <a:spcPct val="100000"/>
-              </a:lnSpc>
-              <a:buNone/>
-            </a:pPr>
-            <a:fld id="{4043E6B8-39DB-42B0-9533-604B872A4659}" type="slidenum">
-              <a:rPr b="0" lang="en-US" sz="900" spc="-1" strike="noStrike">
-                <a:solidFill>
-                  <a:srgbClr val="8b8b8b"/>
-                </a:solidFill>
-                <a:latin typeface="Calibri"/>
-              </a:rPr>
-              <a:t>&lt;number&gt;</a:t>
-            </a:fld>
-            <a:endParaRPr b="0" lang="en-US" sz="900" spc="-1" strike="noStrike">
-              <a:latin typeface="Times New Roman"/>
-            </a:endParaRPr>
-          </a:p>
-        </p:txBody>
-      </p:sp>
-      <p:sp>
-        <p:nvSpPr>
-          <p:cNvPr id="3" name="PlaceHolder 4"/>
-          <p:cNvSpPr>
-            <a:spLocks noGrp="1"/>
-          </p:cNvSpPr>
-          <p:nvPr>
-            <p:ph type="dt" idx="3"/>
-          </p:nvPr>
-        </p:nvSpPr>
-        <p:spPr>
-          <a:xfrm>
-            <a:off x="628560" y="4767120"/>
-            <a:ext cx="2056680" cy="273240"/>
-          </a:xfrm>
-          <a:prstGeom prst="rect">
-            <a:avLst/>
-          </a:prstGeom>
-          <a:noFill/>
-          <a:ln w="0">
-            <a:noFill/>
-          </a:ln>
-        </p:spPr>
-        <p:txBody>
-          <a:bodyPr lIns="90000" rIns="90000" tIns="45000" bIns="45000" anchor="ctr">
-            <a:noAutofit/>
-          </a:bodyPr>
-          <a:lstStyle>
-            <a:lvl1pPr>
-              <a:defRPr b="0" lang="en-US" sz="1400" spc="-1" strike="noStrike">
-                <a:latin typeface="Times New Roman"/>
-              </a:defRPr>
-            </a:lvl1pPr>
-          </a:lstStyle>
-          <a:p>
-            <a:r>
-              <a:rPr b="0" lang="en-US" sz="1400" spc="-1" strike="noStrike">
-                <a:latin typeface="Times New Roman"/>
-              </a:rPr>
-              <a:t>&lt;date/time&gt;</a:t>
-            </a:r>
-            <a:endParaRPr b="0" lang="en-US" sz="1400" spc="-1" strike="noStrike">
-              <a:latin typeface="Times New Roman"/>
-            </a:endParaRPr>
-          </a:p>
-        </p:txBody>
-      </p:sp>
-      <p:sp>
-        <p:nvSpPr>
-          <p:cNvPr id="4" name="PlaceHolder 5"/>
           <p:cNvSpPr>
             <a:spLocks noGrp="1"/>
           </p:cNvSpPr>
@@ -3460,7 +3197,7 @@
         <p:spPr>
           <a:xfrm>
             <a:off x="457200" y="1203480"/>
-            <a:ext cx="8229240" cy="2982960"/>
+            <a:ext cx="8228880" cy="2982600"/>
           </a:xfrm>
           <a:prstGeom prst="rect">
             <a:avLst/>
@@ -3487,12 +3224,12 @@
               <a:buChar char=""/>
             </a:pPr>
             <a:r>
-              <a:rPr b="0" lang="en-US" sz="3200" spc="-1" strike="noStrike">
+              <a:rPr b="0" lang="en-US" sz="1800" spc="-1" strike="noStrike">
                 <a:latin typeface="Arial"/>
               </a:rPr>
               <a:t>Click to edit the outline text format</a:t>
             </a:r>
-            <a:endParaRPr b="0" lang="en-US" sz="3200" spc="-1" strike="noStrike">
+            <a:endParaRPr b="0" lang="en-US" sz="1800" spc="-1" strike="noStrike">
               <a:latin typeface="Arial"/>
             </a:endParaRPr>
           </a:p>
@@ -3509,12 +3246,12 @@
               <a:buChar char=""/>
             </a:pPr>
             <a:r>
-              <a:rPr b="0" lang="en-US" sz="2800" spc="-1" strike="noStrike">
+              <a:rPr b="0" lang="en-US" sz="1800" spc="-1" strike="noStrike">
                 <a:latin typeface="Arial"/>
               </a:rPr>
               <a:t>Second Outline Level</a:t>
             </a:r>
-            <a:endParaRPr b="0" lang="en-US" sz="2800" spc="-1" strike="noStrike">
+            <a:endParaRPr b="0" lang="en-US" sz="1800" spc="-1" strike="noStrike">
               <a:latin typeface="Arial"/>
             </a:endParaRPr>
           </a:p>
@@ -3531,12 +3268,12 @@
               <a:buChar char=""/>
             </a:pPr>
             <a:r>
-              <a:rPr b="0" lang="en-US" sz="2400" spc="-1" strike="noStrike">
+              <a:rPr b="0" lang="en-US" sz="1800" spc="-1" strike="noStrike">
                 <a:latin typeface="Arial"/>
               </a:rPr>
               <a:t>Third Outline Level</a:t>
             </a:r>
-            <a:endParaRPr b="0" lang="en-US" sz="2400" spc="-1" strike="noStrike">
+            <a:endParaRPr b="0" lang="en-US" sz="1800" spc="-1" strike="noStrike">
               <a:latin typeface="Arial"/>
             </a:endParaRPr>
           </a:p>
@@ -3553,12 +3290,12 @@
               <a:buChar char=""/>
             </a:pPr>
             <a:r>
-              <a:rPr b="0" lang="en-US" sz="2000" spc="-1" strike="noStrike">
+              <a:rPr b="0" lang="en-US" sz="1800" spc="-1" strike="noStrike">
                 <a:latin typeface="Arial"/>
               </a:rPr>
               <a:t>Fourth Outline Level</a:t>
             </a:r>
-            <a:endParaRPr b="0" lang="en-US" sz="2000" spc="-1" strike="noStrike">
+            <a:endParaRPr b="0" lang="en-US" sz="1800" spc="-1" strike="noStrike">
               <a:latin typeface="Arial"/>
             </a:endParaRPr>
           </a:p>
@@ -3575,12 +3312,12 @@
               <a:buChar char=""/>
             </a:pPr>
             <a:r>
-              <a:rPr b="0" lang="en-US" sz="2000" spc="-1" strike="noStrike">
+              <a:rPr b="0" lang="en-US" sz="1800" spc="-1" strike="noStrike">
                 <a:latin typeface="Arial"/>
               </a:rPr>
               <a:t>Fifth Outline Level</a:t>
             </a:r>
-            <a:endParaRPr b="0" lang="en-US" sz="2000" spc="-1" strike="noStrike">
+            <a:endParaRPr b="0" lang="en-US" sz="1800" spc="-1" strike="noStrike">
               <a:latin typeface="Arial"/>
             </a:endParaRPr>
           </a:p>
@@ -3597,12 +3334,12 @@
               <a:buChar char=""/>
             </a:pPr>
             <a:r>
-              <a:rPr b="0" lang="en-US" sz="2000" spc="-1" strike="noStrike">
+              <a:rPr b="0" lang="en-US" sz="1800" spc="-1" strike="noStrike">
                 <a:latin typeface="Arial"/>
               </a:rPr>
               <a:t>Sixth Outline Level</a:t>
             </a:r>
-            <a:endParaRPr b="0" lang="en-US" sz="2000" spc="-1" strike="noStrike">
+            <a:endParaRPr b="0" lang="en-US" sz="1800" spc="-1" strike="noStrike">
               <a:latin typeface="Arial"/>
             </a:endParaRPr>
           </a:p>
@@ -3619,13 +3356,180 @@
               <a:buChar char=""/>
             </a:pPr>
             <a:r>
-              <a:rPr b="0" lang="en-US" sz="2000" spc="-1" strike="noStrike">
+              <a:rPr b="0" lang="en-US" sz="1800" spc="-1" strike="noStrike">
                 <a:latin typeface="Arial"/>
               </a:rPr>
               <a:t>Seventh Outline Level</a:t>
             </a:r>
-            <a:endParaRPr b="0" lang="en-US" sz="2000" spc="-1" strike="noStrike">
-              <a:latin typeface="Arial"/>
+            <a:endParaRPr b="0" lang="en-US" sz="1800" spc="-1" strike="noStrike">
+              <a:latin typeface="Arial"/>
+            </a:endParaRPr>
+          </a:p>
+        </p:txBody>
+      </p:sp>
+      <p:sp>
+        <p:nvSpPr>
+          <p:cNvPr id="2" name="PlaceHolder 3"/>
+          <p:cNvSpPr>
+            <a:spLocks noGrp="1"/>
+          </p:cNvSpPr>
+          <p:nvPr>
+            <p:ph type="ftr" idx="1"/>
+          </p:nvPr>
+        </p:nvSpPr>
+        <p:spPr>
+          <a:xfrm>
+            <a:off x="3029040" y="4767120"/>
+            <a:ext cx="3085200" cy="272880"/>
+          </a:xfrm>
+          <a:prstGeom prst="rect">
+            <a:avLst/>
+          </a:prstGeom>
+          <a:noFill/>
+          <a:ln w="0">
+            <a:noFill/>
+          </a:ln>
+        </p:spPr>
+        <p:txBody>
+          <a:bodyPr lIns="90000" rIns="90000" tIns="45000" bIns="45000" anchor="ctr">
+            <a:noAutofit/>
+          </a:bodyPr>
+          <a:lstStyle>
+            <a:lvl1pPr algn="ctr">
+              <a:lnSpc>
+                <a:spcPct val="100000"/>
+              </a:lnSpc>
+              <a:buNone/>
+              <a:defRPr b="0" lang="en-US" sz="1400" spc="-1" strike="noStrike">
+                <a:latin typeface="Times New Roman"/>
+              </a:defRPr>
+            </a:lvl1pPr>
+          </a:lstStyle>
+          <a:p>
+            <a:pPr algn="ctr">
+              <a:lnSpc>
+                <a:spcPct val="100000"/>
+              </a:lnSpc>
+              <a:buNone/>
+            </a:pPr>
+            <a:r>
+              <a:rPr b="0" lang="en-US" sz="1400" spc="-1" strike="noStrike">
+                <a:latin typeface="Times New Roman"/>
+              </a:rPr>
+              <a:t>&lt;footer&gt;</a:t>
+            </a:r>
+            <a:endParaRPr b="0" lang="en-US" sz="1400" spc="-1" strike="noStrike">
+              <a:latin typeface="Times New Roman"/>
+            </a:endParaRPr>
+          </a:p>
+        </p:txBody>
+      </p:sp>
+      <p:sp>
+        <p:nvSpPr>
+          <p:cNvPr id="3" name="PlaceHolder 4"/>
+          <p:cNvSpPr>
+            <a:spLocks noGrp="1"/>
+          </p:cNvSpPr>
+          <p:nvPr>
+            <p:ph type="sldNum" idx="2"/>
+          </p:nvPr>
+        </p:nvSpPr>
+        <p:spPr>
+          <a:xfrm>
+            <a:off x="6458040" y="4767120"/>
+            <a:ext cx="2056320" cy="272880"/>
+          </a:xfrm>
+          <a:prstGeom prst="rect">
+            <a:avLst/>
+          </a:prstGeom>
+          <a:noFill/>
+          <a:ln w="0">
+            <a:noFill/>
+          </a:ln>
+        </p:spPr>
+        <p:txBody>
+          <a:bodyPr lIns="90000" rIns="90000" tIns="45000" bIns="45000" anchor="ctr">
+            <a:noAutofit/>
+          </a:bodyPr>
+          <a:lstStyle>
+            <a:lvl1pPr algn="r">
+              <a:lnSpc>
+                <a:spcPct val="100000"/>
+              </a:lnSpc>
+              <a:buNone/>
+              <a:defRPr b="0" lang="en-US" sz="900" spc="-1" strike="noStrike">
+                <a:solidFill>
+                  <a:srgbClr val="8b8b8b"/>
+                </a:solidFill>
+                <a:latin typeface="Calibri"/>
+              </a:defRPr>
+            </a:lvl1pPr>
+          </a:lstStyle>
+          <a:p>
+            <a:pPr algn="r">
+              <a:lnSpc>
+                <a:spcPct val="100000"/>
+              </a:lnSpc>
+              <a:buNone/>
+            </a:pPr>
+            <a:fld id="{57803415-CEF8-44F9-861A-C1CC9FFF8439}" type="slidenum">
+              <a:rPr b="0" lang="en-US" sz="900" spc="-1" strike="noStrike">
+                <a:solidFill>
+                  <a:srgbClr val="8b8b8b"/>
+                </a:solidFill>
+                <a:latin typeface="Calibri"/>
+              </a:rPr>
+              <a:t>&lt;number&gt;</a:t>
+            </a:fld>
+            <a:endParaRPr b="0" lang="en-US" sz="900" spc="-1" strike="noStrike">
+              <a:latin typeface="Times New Roman"/>
+            </a:endParaRPr>
+          </a:p>
+        </p:txBody>
+      </p:sp>
+      <p:sp>
+        <p:nvSpPr>
+          <p:cNvPr id="4" name="PlaceHolder 5"/>
+          <p:cNvSpPr>
+            <a:spLocks noGrp="1"/>
+          </p:cNvSpPr>
+          <p:nvPr>
+            <p:ph type="dt" idx="3"/>
+          </p:nvPr>
+        </p:nvSpPr>
+        <p:spPr>
+          <a:xfrm>
+            <a:off x="628560" y="4767120"/>
+            <a:ext cx="2056320" cy="272880"/>
+          </a:xfrm>
+          <a:prstGeom prst="rect">
+            <a:avLst/>
+          </a:prstGeom>
+          <a:noFill/>
+          <a:ln w="0">
+            <a:noFill/>
+          </a:ln>
+        </p:spPr>
+        <p:txBody>
+          <a:bodyPr lIns="90000" rIns="90000" tIns="45000" bIns="45000" anchor="ctr">
+            <a:noAutofit/>
+          </a:bodyPr>
+          <a:lstStyle>
+            <a:lvl1pPr>
+              <a:defRPr b="0" lang="en-US" sz="1400" spc="-1" strike="noStrike">
+                <a:latin typeface="Times New Roman"/>
+              </a:defRPr>
+            </a:lvl1pPr>
+          </a:lstStyle>
+          <a:p>
+            <a:r>
+              <a:rPr b="0" lang="en-US" sz="1400" spc="-1" strike="noStrike">
+                <a:latin typeface="Times New Roman"/>
+              </a:rPr>
+              <a:t>&lt;date/time&gt;</a:t>
+            </a:r>
+            <a:endParaRPr b="0" lang="en-US" sz="1400" spc="-1" strike="noStrike">
+              <a:latin typeface="Times New Roman"/>
             </a:endParaRPr>
           </a:p>
         </p:txBody>
@@ -3676,7 +3580,7 @@
         <p:spPr>
           <a:xfrm>
             <a:off x="186840" y="178200"/>
-            <a:ext cx="8769960" cy="4757760"/>
+            <a:ext cx="8769600" cy="4757400"/>
           </a:xfrm>
           <a:prstGeom prst="roundRect">
             <a:avLst>
@@ -3714,7 +3618,7 @@
         <p:spPr>
           <a:xfrm>
             <a:off x="460080" y="622080"/>
-            <a:ext cx="6925680" cy="3306600"/>
+            <a:ext cx="6925320" cy="3306240"/>
           </a:xfrm>
           <a:prstGeom prst="rect">
             <a:avLst/>
@@ -3770,7 +3674,7 @@
         <p:spPr>
           <a:xfrm>
             <a:off x="5753880" y="2557440"/>
-            <a:ext cx="4009680" cy="3133080"/>
+            <a:ext cx="4009320" cy="3132720"/>
           </a:xfrm>
           <a:prstGeom prst="rect">
             <a:avLst/>
@@ -3819,7 +3723,7 @@
         <p:spPr>
           <a:xfrm>
             <a:off x="0" y="-478800"/>
-            <a:ext cx="9143280" cy="1765800"/>
+            <a:ext cx="9142920" cy="1765440"/>
           </a:xfrm>
           <a:prstGeom prst="roundRect">
             <a:avLst>
@@ -3857,7 +3761,7 @@
         <p:spPr>
           <a:xfrm>
             <a:off x="384840" y="1726200"/>
-            <a:ext cx="2664720" cy="713520"/>
+            <a:ext cx="2664360" cy="713160"/>
           </a:xfrm>
           <a:prstGeom prst="rect">
             <a:avLst/>
@@ -3909,7 +3813,7 @@
         <p:spPr>
           <a:xfrm>
             <a:off x="384840" y="2611080"/>
-            <a:ext cx="2664720" cy="1564920"/>
+            <a:ext cx="2664360" cy="1564560"/>
           </a:xfrm>
           <a:prstGeom prst="rect">
             <a:avLst/>
@@ -3971,7 +3875,7 @@
         <p:spPr>
           <a:xfrm>
             <a:off x="3239280" y="1726200"/>
-            <a:ext cx="2664720" cy="713520"/>
+            <a:ext cx="2664360" cy="713160"/>
           </a:xfrm>
           <a:prstGeom prst="rect">
             <a:avLst/>
@@ -4023,7 +3927,7 @@
         <p:spPr>
           <a:xfrm>
             <a:off x="3239280" y="2611080"/>
-            <a:ext cx="2664720" cy="1564920"/>
+            <a:ext cx="2664360" cy="1564560"/>
           </a:xfrm>
           <a:prstGeom prst="rect">
             <a:avLst/>
@@ -4085,7 +3989,7 @@
         <p:spPr>
           <a:xfrm>
             <a:off x="6093720" y="1726200"/>
-            <a:ext cx="2664720" cy="713520"/>
+            <a:ext cx="2664360" cy="713160"/>
           </a:xfrm>
           <a:prstGeom prst="rect">
             <a:avLst/>
@@ -4137,7 +4041,7 @@
         <p:spPr>
           <a:xfrm>
             <a:off x="6093720" y="2611080"/>
-            <a:ext cx="2664720" cy="1564920"/>
+            <a:ext cx="2664360" cy="1564560"/>
           </a:xfrm>
           <a:prstGeom prst="rect">
             <a:avLst/>
@@ -4298,7 +4202,7 @@
         <p:spPr>
           <a:xfrm>
             <a:off x="8519760" y="4831560"/>
-            <a:ext cx="484560" cy="226800"/>
+            <a:ext cx="484200" cy="226800"/>
           </a:xfrm>
           <a:prstGeom prst="rect">
             <a:avLst/>
@@ -4350,7 +4254,7 @@
         <p:spPr>
           <a:xfrm>
             <a:off x="313200" y="156600"/>
-            <a:ext cx="8457840" cy="757440"/>
+            <a:ext cx="8457480" cy="757080"/>
           </a:xfrm>
           <a:prstGeom prst="rect">
             <a:avLst/>
@@ -4379,7 +4283,11 @@
             </a:pPr>
             <a:r>
               <a:rPr b="0" lang="en-US" sz="1800" spc="-1" strike="noStrike">
-                <a:latin typeface="Arial"/>
+                <a:solidFill>
+                  <a:srgbClr val="000000"/>
+                </a:solidFill>
+                <a:latin typeface="Arial"/>
+                <a:ea typeface="DejaVu Sans"/>
               </a:rPr>
               <a:t>TITLE</a:t>
             </a:r>
@@ -4428,7 +4336,7 @@
         <p:spPr>
           <a:xfrm>
             <a:off x="186840" y="178200"/>
-            <a:ext cx="8769960" cy="4757760"/>
+            <a:ext cx="8769600" cy="4757400"/>
           </a:xfrm>
           <a:prstGeom prst="roundRect">
             <a:avLst>
@@ -4466,7 +4374,7 @@
         <p:spPr>
           <a:xfrm>
             <a:off x="460080" y="622080"/>
-            <a:ext cx="6925680" cy="3306600"/>
+            <a:ext cx="6925320" cy="3306240"/>
           </a:xfrm>
           <a:prstGeom prst="rect">
             <a:avLst/>
@@ -4522,7 +4430,7 @@
         <p:spPr>
           <a:xfrm>
             <a:off x="5753880" y="2557440"/>
-            <a:ext cx="4009680" cy="3133080"/>
+            <a:ext cx="4009320" cy="3132720"/>
           </a:xfrm>
           <a:prstGeom prst="rect">
             <a:avLst/>
@@ -4575,7 +4483,7 @@
         <p:spPr>
           <a:xfrm>
             <a:off x="5753880" y="2557440"/>
-            <a:ext cx="4009680" cy="3133080"/>
+            <a:ext cx="4009320" cy="3132720"/>
           </a:xfrm>
           <a:prstGeom prst="rect">
             <a:avLst/>
@@ -4594,7 +4502,7 @@
         <p:spPr>
           <a:xfrm>
             <a:off x="185760" y="831240"/>
-            <a:ext cx="899280" cy="899280"/>
+            <a:ext cx="898920" cy="898920"/>
           </a:xfrm>
           <a:prstGeom prst="ellipse">
             <a:avLst/>
@@ -4654,7 +4562,7 @@
         <p:spPr>
           <a:xfrm>
             <a:off x="185760" y="2381400"/>
-            <a:ext cx="899280" cy="887400"/>
+            <a:ext cx="898920" cy="887040"/>
           </a:xfrm>
           <a:prstGeom prst="ellipse">
             <a:avLst/>
@@ -4714,7 +4622,7 @@
         <p:spPr>
           <a:xfrm>
             <a:off x="185760" y="3860640"/>
-            <a:ext cx="899280" cy="899280"/>
+            <a:ext cx="898920" cy="898920"/>
           </a:xfrm>
           <a:prstGeom prst="ellipse">
             <a:avLst/>
@@ -4774,7 +4682,7 @@
         <p:spPr>
           <a:xfrm>
             <a:off x="967680" y="797040"/>
-            <a:ext cx="3764520" cy="550440"/>
+            <a:ext cx="3764160" cy="550080"/>
           </a:xfrm>
           <a:prstGeom prst="rect">
             <a:avLst/>
@@ -4836,7 +4744,7 @@
         <p:spPr>
           <a:xfrm>
             <a:off x="967680" y="1332720"/>
-            <a:ext cx="3764520" cy="789480"/>
+            <a:ext cx="3764160" cy="789120"/>
           </a:xfrm>
           <a:prstGeom prst="rect">
             <a:avLst/>
@@ -4898,7 +4806,7 @@
         <p:spPr>
           <a:xfrm>
             <a:off x="964080" y="2292480"/>
-            <a:ext cx="3764520" cy="550440"/>
+            <a:ext cx="3764160" cy="550080"/>
           </a:xfrm>
           <a:prstGeom prst="rect">
             <a:avLst/>
@@ -4950,7 +4858,7 @@
         <p:spPr>
           <a:xfrm>
             <a:off x="964080" y="2825280"/>
-            <a:ext cx="3764520" cy="843120"/>
+            <a:ext cx="3764160" cy="842760"/>
           </a:xfrm>
           <a:prstGeom prst="rect">
             <a:avLst/>
@@ -5012,7 +4920,7 @@
         <p:spPr>
           <a:xfrm>
             <a:off x="964080" y="3777840"/>
-            <a:ext cx="3764520" cy="550440"/>
+            <a:ext cx="3764160" cy="550080"/>
           </a:xfrm>
           <a:prstGeom prst="rect">
             <a:avLst/>
@@ -5064,7 +4972,7 @@
         <p:spPr>
           <a:xfrm>
             <a:off x="964080" y="4310640"/>
-            <a:ext cx="3764520" cy="794520"/>
+            <a:ext cx="3764160" cy="794160"/>
           </a:xfrm>
           <a:prstGeom prst="rect">
             <a:avLst/>
@@ -5126,7 +5034,7 @@
         <p:spPr>
           <a:xfrm>
             <a:off x="5084640" y="987840"/>
-            <a:ext cx="3687480" cy="3496680"/>
+            <a:ext cx="3687120" cy="3496320"/>
           </a:xfrm>
           <a:prstGeom prst="roundRect">
             <a:avLst>
@@ -5190,7 +5098,7 @@
         <p:spPr>
           <a:xfrm>
             <a:off x="8519760" y="4831560"/>
-            <a:ext cx="484560" cy="226800"/>
+            <a:ext cx="484200" cy="226800"/>
           </a:xfrm>
           <a:prstGeom prst="rect">
             <a:avLst/>
@@ -5242,7 +5150,7 @@
         <p:spPr>
           <a:xfrm>
             <a:off x="421200" y="228600"/>
-            <a:ext cx="8457840" cy="685440"/>
+            <a:ext cx="8457480" cy="685080"/>
           </a:xfrm>
           <a:prstGeom prst="rect">
             <a:avLst/>
@@ -5271,7 +5179,11 @@
             </a:pPr>
             <a:r>
               <a:rPr b="0" lang="en-US" sz="1800" spc="-1" strike="noStrike">
-                <a:latin typeface="Arial"/>
+                <a:solidFill>
+                  <a:srgbClr val="000000"/>
+                </a:solidFill>
+                <a:latin typeface="Arial"/>
+                <a:ea typeface="DejaVu Sans"/>
               </a:rPr>
               <a:t>TITLE</a:t>
             </a:r>
@@ -5320,7 +5232,7 @@
         <p:spPr>
           <a:xfrm>
             <a:off x="506520" y="1484640"/>
-            <a:ext cx="2556720" cy="2055240"/>
+            <a:ext cx="2556360" cy="2054880"/>
           </a:xfrm>
           <a:prstGeom prst="roundRect">
             <a:avLst>
@@ -5360,7 +5272,7 @@
         <p:spPr>
           <a:xfrm>
             <a:off x="624240" y="1616760"/>
-            <a:ext cx="2289600" cy="729000"/>
+            <a:ext cx="2289240" cy="728640"/>
           </a:xfrm>
           <a:prstGeom prst="rect">
             <a:avLst/>
@@ -5412,7 +5324,7 @@
         <p:spPr>
           <a:xfrm>
             <a:off x="624240" y="2400480"/>
-            <a:ext cx="2289600" cy="1162080"/>
+            <a:ext cx="2289240" cy="1161720"/>
           </a:xfrm>
           <a:prstGeom prst="rect">
             <a:avLst/>
@@ -5474,7 +5386,7 @@
         <p:spPr>
           <a:xfrm>
             <a:off x="3309120" y="2066040"/>
-            <a:ext cx="2556720" cy="2055240"/>
+            <a:ext cx="2556360" cy="2054880"/>
           </a:xfrm>
           <a:prstGeom prst="roundRect">
             <a:avLst>
@@ -5514,7 +5426,7 @@
         <p:spPr>
           <a:xfrm>
             <a:off x="3426840" y="2198160"/>
-            <a:ext cx="2289600" cy="729000"/>
+            <a:ext cx="2289240" cy="728640"/>
           </a:xfrm>
           <a:prstGeom prst="rect">
             <a:avLst/>
@@ -5566,7 +5478,7 @@
         <p:spPr>
           <a:xfrm>
             <a:off x="3426840" y="2981880"/>
-            <a:ext cx="2289600" cy="1162080"/>
+            <a:ext cx="2289240" cy="1161720"/>
           </a:xfrm>
           <a:prstGeom prst="rect">
             <a:avLst/>
@@ -5618,7 +5530,7 @@
         <p:spPr>
           <a:xfrm>
             <a:off x="6111720" y="2659320"/>
-            <a:ext cx="2556720" cy="2055240"/>
+            <a:ext cx="2556360" cy="2054880"/>
           </a:xfrm>
           <a:prstGeom prst="roundRect">
             <a:avLst>
@@ -5658,7 +5570,7 @@
         <p:spPr>
           <a:xfrm>
             <a:off x="6229440" y="2791440"/>
-            <a:ext cx="2289600" cy="729000"/>
+            <a:ext cx="2289240" cy="728640"/>
           </a:xfrm>
           <a:prstGeom prst="rect">
             <a:avLst/>
@@ -5693,7 +5605,7 @@
                 <a:latin typeface="Arial"/>
                 <a:ea typeface="DejaVu Sans"/>
               </a:rPr>
-              <a:t>SUBTITLE2</a:t>
+              <a:t>SUBTITLE3</a:t>
             </a:r>
             <a:endParaRPr b="0" lang="en-US" sz="1400" spc="-1" strike="noStrike">
               <a:latin typeface="Arial"/>
@@ -5710,7 +5622,7 @@
         <p:spPr>
           <a:xfrm>
             <a:off x="6229440" y="3574800"/>
-            <a:ext cx="2289600" cy="1162080"/>
+            <a:ext cx="2289240" cy="1161720"/>
           </a:xfrm>
           <a:prstGeom prst="rect">
             <a:avLst/>
@@ -5745,7 +5657,7 @@
                 <a:latin typeface="Arial"/>
                 <a:ea typeface="DejaVu Sans"/>
               </a:rPr>
-              <a:t>TEXT2</a:t>
+              <a:t>TEXT3</a:t>
             </a:r>
             <a:endParaRPr b="0" lang="en-US" sz="1100" spc="-1" strike="noStrike">
               <a:latin typeface="Arial"/>
@@ -5762,7 +5674,7 @@
         <p:spPr>
           <a:xfrm>
             <a:off x="8519760" y="4831560"/>
-            <a:ext cx="484560" cy="226800"/>
+            <a:ext cx="484200" cy="226800"/>
           </a:xfrm>
           <a:prstGeom prst="rect">
             <a:avLst/>
@@ -5814,7 +5726,7 @@
         <p:spPr>
           <a:xfrm>
             <a:off x="457200" y="228600"/>
-            <a:ext cx="8229240" cy="1142640"/>
+            <a:ext cx="8228880" cy="1142280"/>
           </a:xfrm>
           <a:prstGeom prst="rect">
             <a:avLst/>
@@ -5843,7 +5755,11 @@
             </a:pPr>
             <a:r>
               <a:rPr b="0" lang="en-US" sz="1800" spc="-1" strike="noStrike">
-                <a:latin typeface="Arial"/>
+                <a:solidFill>
+                  <a:srgbClr val="000000"/>
+                </a:solidFill>
+                <a:latin typeface="Arial"/>
+                <a:ea typeface="DejaVu Sans"/>
               </a:rPr>
               <a:t>TITLE</a:t>
             </a:r>
@@ -5892,7 +5808,7 @@
         <p:spPr>
           <a:xfrm>
             <a:off x="3601800" y="3271680"/>
-            <a:ext cx="5236200" cy="1320840"/>
+            <a:ext cx="5235840" cy="1320480"/>
           </a:xfrm>
           <a:prstGeom prst="roundRect">
             <a:avLst>
@@ -5930,7 +5846,7 @@
         <p:spPr>
           <a:xfrm>
             <a:off x="6308640" y="1028880"/>
-            <a:ext cx="2532960" cy="2056680"/>
+            <a:ext cx="2532600" cy="2056320"/>
           </a:xfrm>
           <a:prstGeom prst="roundRect">
             <a:avLst>
@@ -5968,7 +5884,7 @@
         <p:spPr>
           <a:xfrm>
             <a:off x="3604320" y="1014480"/>
-            <a:ext cx="2532960" cy="2056680"/>
+            <a:ext cx="2532600" cy="2056320"/>
           </a:xfrm>
           <a:prstGeom prst="roundRect">
             <a:avLst>
@@ -6006,7 +5922,7 @@
         <p:spPr>
           <a:xfrm>
             <a:off x="3696480" y="1059120"/>
-            <a:ext cx="2343240" cy="713520"/>
+            <a:ext cx="2342880" cy="713160"/>
           </a:xfrm>
           <a:prstGeom prst="rect">
             <a:avLst/>
@@ -6068,7 +5984,7 @@
         <p:spPr>
           <a:xfrm>
             <a:off x="3696480" y="1843560"/>
-            <a:ext cx="2343240" cy="1141920"/>
+            <a:ext cx="2342880" cy="1141560"/>
           </a:xfrm>
           <a:prstGeom prst="rect">
             <a:avLst/>
@@ -6130,7 +6046,7 @@
         <p:spPr>
           <a:xfrm>
             <a:off x="6400080" y="1059120"/>
-            <a:ext cx="2340000" cy="713520"/>
+            <a:ext cx="2339640" cy="713160"/>
           </a:xfrm>
           <a:prstGeom prst="rect">
             <a:avLst/>
@@ -6182,7 +6098,7 @@
         <p:spPr>
           <a:xfrm>
             <a:off x="6400080" y="1843560"/>
-            <a:ext cx="2340000" cy="1141920"/>
+            <a:ext cx="2339640" cy="1141560"/>
           </a:xfrm>
           <a:prstGeom prst="rect">
             <a:avLst/>
@@ -6244,7 +6160,7 @@
         <p:spPr>
           <a:xfrm>
             <a:off x="3696480" y="3362040"/>
-            <a:ext cx="5236200" cy="328680"/>
+            <a:ext cx="5235840" cy="328320"/>
           </a:xfrm>
           <a:prstGeom prst="rect">
             <a:avLst/>
@@ -6296,7 +6212,7 @@
         <p:spPr>
           <a:xfrm>
             <a:off x="3696480" y="3713400"/>
-            <a:ext cx="5146560" cy="713520"/>
+            <a:ext cx="5146200" cy="713160"/>
           </a:xfrm>
           <a:prstGeom prst="rect">
             <a:avLst/>
@@ -6358,7 +6274,7 @@
         <p:spPr>
           <a:xfrm>
             <a:off x="384840" y="1028880"/>
-            <a:ext cx="3002400" cy="3564000"/>
+            <a:ext cx="3002040" cy="3563640"/>
           </a:xfrm>
           <a:prstGeom prst="roundRect">
             <a:avLst>
@@ -6422,7 +6338,7 @@
         <p:spPr>
           <a:xfrm>
             <a:off x="8519760" y="4831560"/>
-            <a:ext cx="484560" cy="226800"/>
+            <a:ext cx="484200" cy="226800"/>
           </a:xfrm>
           <a:prstGeom prst="rect">
             <a:avLst/>
@@ -6474,7 +6390,7 @@
         <p:spPr>
           <a:xfrm>
             <a:off x="313200" y="228600"/>
-            <a:ext cx="8457840" cy="685440"/>
+            <a:ext cx="8457480" cy="685080"/>
           </a:xfrm>
           <a:prstGeom prst="rect">
             <a:avLst/>
@@ -6503,7 +6419,11 @@
             </a:pPr>
             <a:r>
               <a:rPr b="0" lang="en-US" sz="1800" spc="-1" strike="noStrike">
-                <a:latin typeface="Arial"/>
+                <a:solidFill>
+                  <a:srgbClr val="000000"/>
+                </a:solidFill>
+                <a:latin typeface="Arial"/>
+                <a:ea typeface="DejaVu Sans"/>
               </a:rPr>
               <a:t>TITLE</a:t>
             </a:r>
@@ -6556,7 +6476,7 @@
         <p:spPr>
           <a:xfrm>
             <a:off x="-877680" y="2245320"/>
-            <a:ext cx="4613040" cy="3604680"/>
+            <a:ext cx="4612680" cy="3604320"/>
           </a:xfrm>
           <a:prstGeom prst="rect">
             <a:avLst/>
@@ -6575,7 +6495,7 @@
         <p:spPr>
           <a:xfrm>
             <a:off x="4157640" y="631080"/>
-            <a:ext cx="899280" cy="899280"/>
+            <a:ext cx="898920" cy="898920"/>
           </a:xfrm>
           <a:prstGeom prst="ellipse">
             <a:avLst/>
@@ -6637,7 +6557,7 @@
         <p:spPr>
           <a:xfrm>
             <a:off x="4157640" y="2127600"/>
-            <a:ext cx="899280" cy="887400"/>
+            <a:ext cx="898920" cy="887040"/>
           </a:xfrm>
           <a:prstGeom prst="ellipse">
             <a:avLst/>
@@ -6699,7 +6619,7 @@
         <p:spPr>
           <a:xfrm>
             <a:off x="4157640" y="3612240"/>
-            <a:ext cx="899280" cy="899280"/>
+            <a:ext cx="898920" cy="898920"/>
           </a:xfrm>
           <a:prstGeom prst="ellipse">
             <a:avLst/>
@@ -6761,7 +6681,7 @@
         <p:spPr>
           <a:xfrm>
             <a:off x="5146560" y="489600"/>
-            <a:ext cx="3578760" cy="550440"/>
+            <a:ext cx="3578400" cy="550080"/>
           </a:xfrm>
           <a:prstGeom prst="rect">
             <a:avLst/>
@@ -6823,7 +6743,7 @@
         <p:spPr>
           <a:xfrm>
             <a:off x="5146560" y="1025280"/>
-            <a:ext cx="3578760" cy="789480"/>
+            <a:ext cx="3578400" cy="789120"/>
           </a:xfrm>
           <a:prstGeom prst="rect">
             <a:avLst/>
@@ -6885,7 +6805,7 @@
         <p:spPr>
           <a:xfrm>
             <a:off x="5142960" y="1985400"/>
-            <a:ext cx="3578760" cy="550440"/>
+            <a:ext cx="3578400" cy="550080"/>
           </a:xfrm>
           <a:prstGeom prst="rect">
             <a:avLst/>
@@ -6937,7 +6857,7 @@
         <p:spPr>
           <a:xfrm>
             <a:off x="5142960" y="2517840"/>
-            <a:ext cx="3578760" cy="843120"/>
+            <a:ext cx="3578400" cy="842760"/>
           </a:xfrm>
           <a:prstGeom prst="rect">
             <a:avLst/>
@@ -6999,7 +6919,7 @@
         <p:spPr>
           <a:xfrm>
             <a:off x="5142960" y="3470760"/>
-            <a:ext cx="3578760" cy="550440"/>
+            <a:ext cx="3578400" cy="550080"/>
           </a:xfrm>
           <a:prstGeom prst="rect">
             <a:avLst/>
@@ -7051,7 +6971,7 @@
         <p:spPr>
           <a:xfrm>
             <a:off x="5142960" y="4003560"/>
-            <a:ext cx="3578760" cy="794520"/>
+            <a:ext cx="3578400" cy="794160"/>
           </a:xfrm>
           <a:prstGeom prst="rect">
             <a:avLst/>
@@ -7113,7 +7033,7 @@
         <p:spPr>
           <a:xfrm>
             <a:off x="8519760" y="4831560"/>
-            <a:ext cx="484560" cy="226800"/>
+            <a:ext cx="484200" cy="226800"/>
           </a:xfrm>
           <a:prstGeom prst="rect">
             <a:avLst/>
@@ -7165,7 +7085,7 @@
         <p:spPr>
           <a:xfrm>
             <a:off x="264600" y="228600"/>
-            <a:ext cx="3657240" cy="2016360"/>
+            <a:ext cx="3656880" cy="2016000"/>
           </a:xfrm>
           <a:prstGeom prst="rect">
             <a:avLst/>
@@ -7194,7 +7114,11 @@
             </a:pPr>
             <a:r>
               <a:rPr b="0" lang="en-US" sz="1800" spc="-1" strike="noStrike">
-                <a:latin typeface="Arial"/>
+                <a:solidFill>
+                  <a:srgbClr val="000000"/>
+                </a:solidFill>
+                <a:latin typeface="Arial"/>
+                <a:ea typeface="DejaVu Sans"/>
               </a:rPr>
               <a:t>TITLE</a:t>
             </a:r>
@@ -7243,7 +7167,7 @@
         <p:spPr>
           <a:xfrm>
             <a:off x="4238640" y="831240"/>
-            <a:ext cx="899280" cy="899280"/>
+            <a:ext cx="898920" cy="898920"/>
           </a:xfrm>
           <a:prstGeom prst="ellipse">
             <a:avLst/>
@@ -7303,7 +7227,7 @@
         <p:spPr>
           <a:xfrm>
             <a:off x="4238640" y="2243880"/>
-            <a:ext cx="899280" cy="887400"/>
+            <a:ext cx="898920" cy="887040"/>
           </a:xfrm>
           <a:prstGeom prst="ellipse">
             <a:avLst/>
@@ -7363,7 +7287,7 @@
         <p:spPr>
           <a:xfrm>
             <a:off x="4238640" y="3667320"/>
-            <a:ext cx="899280" cy="899280"/>
+            <a:ext cx="898920" cy="898920"/>
           </a:xfrm>
           <a:prstGeom prst="ellipse">
             <a:avLst/>
@@ -7423,7 +7347,7 @@
         <p:spPr>
           <a:xfrm>
             <a:off x="5020200" y="797040"/>
-            <a:ext cx="3764520" cy="550440"/>
+            <a:ext cx="3764160" cy="550080"/>
           </a:xfrm>
           <a:prstGeom prst="rect">
             <a:avLst/>
@@ -7485,7 +7409,7 @@
         <p:spPr>
           <a:xfrm>
             <a:off x="5020200" y="1332720"/>
-            <a:ext cx="3764520" cy="789480"/>
+            <a:ext cx="3764160" cy="789120"/>
           </a:xfrm>
           <a:prstGeom prst="rect">
             <a:avLst/>
@@ -7547,7 +7471,7 @@
         <p:spPr>
           <a:xfrm>
             <a:off x="5016600" y="2155320"/>
-            <a:ext cx="3764520" cy="550440"/>
+            <a:ext cx="3764160" cy="550080"/>
           </a:xfrm>
           <a:prstGeom prst="rect">
             <a:avLst/>
@@ -7599,7 +7523,7 @@
         <p:spPr>
           <a:xfrm>
             <a:off x="5016600" y="2687760"/>
-            <a:ext cx="3764520" cy="843120"/>
+            <a:ext cx="3764160" cy="842760"/>
           </a:xfrm>
           <a:prstGeom prst="rect">
             <a:avLst/>
@@ -7661,7 +7585,7 @@
         <p:spPr>
           <a:xfrm>
             <a:off x="5016600" y="3584880"/>
-            <a:ext cx="3764520" cy="550440"/>
+            <a:ext cx="3764160" cy="550080"/>
           </a:xfrm>
           <a:prstGeom prst="rect">
             <a:avLst/>
@@ -7713,7 +7637,7 @@
         <p:spPr>
           <a:xfrm>
             <a:off x="5016600" y="4117320"/>
-            <a:ext cx="3764520" cy="794520"/>
+            <a:ext cx="3764160" cy="794160"/>
           </a:xfrm>
           <a:prstGeom prst="rect">
             <a:avLst/>
@@ -7775,7 +7699,7 @@
         <p:spPr>
           <a:xfrm>
             <a:off x="384840" y="987840"/>
-            <a:ext cx="3687480" cy="3496680"/>
+            <a:ext cx="3687120" cy="3496320"/>
           </a:xfrm>
           <a:prstGeom prst="roundRect">
             <a:avLst>
@@ -7839,7 +7763,7 @@
         <p:spPr>
           <a:xfrm>
             <a:off x="8519760" y="4831560"/>
-            <a:ext cx="484560" cy="226800"/>
+            <a:ext cx="484200" cy="226800"/>
           </a:xfrm>
           <a:prstGeom prst="rect">
             <a:avLst/>
@@ -7891,7 +7815,7 @@
         <p:spPr>
           <a:xfrm>
             <a:off x="300600" y="228600"/>
-            <a:ext cx="8614440" cy="685440"/>
+            <a:ext cx="8614080" cy="685080"/>
           </a:xfrm>
           <a:prstGeom prst="rect">
             <a:avLst/>
@@ -7920,7 +7844,11 @@
             </a:pPr>
             <a:r>
               <a:rPr b="0" lang="en-US" sz="1800" spc="-1" strike="noStrike">
-                <a:latin typeface="Arial"/>
+                <a:solidFill>
+                  <a:srgbClr val="000000"/>
+                </a:solidFill>
+                <a:latin typeface="Arial"/>
+                <a:ea typeface="DejaVu Sans"/>
               </a:rPr>
               <a:t>TITLE</a:t>
             </a:r>
@@ -7969,7 +7897,7 @@
         <p:spPr>
           <a:xfrm>
             <a:off x="0" y="3075480"/>
-            <a:ext cx="9143280" cy="2494800"/>
+            <a:ext cx="9142920" cy="2494440"/>
           </a:xfrm>
           <a:prstGeom prst="roundRect">
             <a:avLst>
@@ -8033,7 +7961,7 @@
         <p:spPr>
           <a:xfrm>
             <a:off x="474840" y="841680"/>
-            <a:ext cx="2556720" cy="2055240"/>
+            <a:ext cx="2556360" cy="2054880"/>
           </a:xfrm>
           <a:prstGeom prst="roundRect">
             <a:avLst>
@@ -8073,7 +8001,7 @@
         <p:spPr>
           <a:xfrm>
             <a:off x="592920" y="973800"/>
-            <a:ext cx="2289600" cy="729000"/>
+            <a:ext cx="2289240" cy="728640"/>
           </a:xfrm>
           <a:prstGeom prst="rect">
             <a:avLst/>
@@ -8125,7 +8053,7 @@
         <p:spPr>
           <a:xfrm>
             <a:off x="592920" y="1757520"/>
-            <a:ext cx="2289600" cy="1162080"/>
+            <a:ext cx="2289240" cy="1161720"/>
           </a:xfrm>
           <a:prstGeom prst="rect">
             <a:avLst/>
@@ -8187,7 +8115,7 @@
         <p:spPr>
           <a:xfrm>
             <a:off x="3309120" y="841680"/>
-            <a:ext cx="2556720" cy="2055240"/>
+            <a:ext cx="2556360" cy="2054880"/>
           </a:xfrm>
           <a:prstGeom prst="roundRect">
             <a:avLst>
@@ -8227,7 +8155,7 @@
         <p:spPr>
           <a:xfrm>
             <a:off x="3426840" y="973800"/>
-            <a:ext cx="2289600" cy="729000"/>
+            <a:ext cx="2289240" cy="728640"/>
           </a:xfrm>
           <a:prstGeom prst="rect">
             <a:avLst/>
@@ -8279,7 +8207,7 @@
         <p:spPr>
           <a:xfrm>
             <a:off x="3426840" y="1757520"/>
-            <a:ext cx="2289600" cy="1162080"/>
+            <a:ext cx="2289240" cy="1161720"/>
           </a:xfrm>
           <a:prstGeom prst="rect">
             <a:avLst/>
@@ -8331,7 +8259,7 @@
         <p:spPr>
           <a:xfrm>
             <a:off x="6143040" y="841680"/>
-            <a:ext cx="2556720" cy="2055240"/>
+            <a:ext cx="2556360" cy="2054880"/>
           </a:xfrm>
           <a:prstGeom prst="roundRect">
             <a:avLst>
@@ -8371,7 +8299,7 @@
         <p:spPr>
           <a:xfrm>
             <a:off x="6260760" y="973800"/>
-            <a:ext cx="2289600" cy="729000"/>
+            <a:ext cx="2289240" cy="728640"/>
           </a:xfrm>
           <a:prstGeom prst="rect">
             <a:avLst/>
@@ -8423,7 +8351,7 @@
         <p:spPr>
           <a:xfrm>
             <a:off x="6260760" y="1757520"/>
-            <a:ext cx="2289600" cy="1162080"/>
+            <a:ext cx="2289240" cy="1161720"/>
           </a:xfrm>
           <a:prstGeom prst="rect">
             <a:avLst/>
@@ -8475,7 +8403,7 @@
         <p:spPr>
           <a:xfrm>
             <a:off x="8519760" y="4831560"/>
-            <a:ext cx="484560" cy="226800"/>
+            <a:ext cx="484200" cy="226800"/>
           </a:xfrm>
           <a:prstGeom prst="rect">
             <a:avLst/>
@@ -8527,7 +8455,7 @@
         <p:spPr>
           <a:xfrm>
             <a:off x="457200" y="349200"/>
-            <a:ext cx="8457840" cy="1022040"/>
+            <a:ext cx="8457480" cy="1021680"/>
           </a:xfrm>
           <a:prstGeom prst="rect">
             <a:avLst/>
@@ -8556,7 +8484,11 @@
             </a:pPr>
             <a:r>
               <a:rPr b="0" lang="en-US" sz="1800" spc="-1" strike="noStrike">
-                <a:latin typeface="Arial"/>
+                <a:solidFill>
+                  <a:srgbClr val="000000"/>
+                </a:solidFill>
+                <a:latin typeface="Arial"/>
+                <a:ea typeface="DejaVu Sans"/>
               </a:rPr>
               <a:t>TITLE</a:t>
             </a:r>
@@ -8612,7 +8544,7 @@
         <p:spPr>
           <a:xfrm>
             <a:off x="5014080" y="250200"/>
-            <a:ext cx="3820320" cy="4624920"/>
+            <a:ext cx="3819960" cy="4624560"/>
           </a:xfrm>
           <a:prstGeom prst="roundRect">
             <a:avLst>
@@ -8678,7 +8610,7 @@
         <p:spPr>
           <a:xfrm>
             <a:off x="329400" y="250200"/>
-            <a:ext cx="4424760" cy="4624920"/>
+            <a:ext cx="4424400" cy="4624560"/>
           </a:xfrm>
           <a:prstGeom prst="roundRect">
             <a:avLst>
@@ -8716,7 +8648,7 @@
         <p:spPr>
           <a:xfrm>
             <a:off x="581760" y="828720"/>
-            <a:ext cx="3901680" cy="550440"/>
+            <a:ext cx="3901320" cy="550080"/>
           </a:xfrm>
           <a:prstGeom prst="rect">
             <a:avLst/>
@@ -8778,7 +8710,7 @@
         <p:spPr>
           <a:xfrm>
             <a:off x="581760" y="1364400"/>
-            <a:ext cx="3901680" cy="789480"/>
+            <a:ext cx="3901320" cy="789120"/>
           </a:xfrm>
           <a:prstGeom prst="rect">
             <a:avLst/>
@@ -8840,7 +8772,7 @@
         <p:spPr>
           <a:xfrm>
             <a:off x="578160" y="2154600"/>
-            <a:ext cx="3901680" cy="550440"/>
+            <a:ext cx="3901320" cy="550080"/>
           </a:xfrm>
           <a:prstGeom prst="rect">
             <a:avLst/>
@@ -8892,7 +8824,7 @@
         <p:spPr>
           <a:xfrm>
             <a:off x="578160" y="2687040"/>
-            <a:ext cx="3901680" cy="843120"/>
+            <a:ext cx="3901320" cy="842760"/>
           </a:xfrm>
           <a:prstGeom prst="rect">
             <a:avLst/>
@@ -8954,7 +8886,7 @@
         <p:spPr>
           <a:xfrm>
             <a:off x="578160" y="3482280"/>
-            <a:ext cx="3901680" cy="550440"/>
+            <a:ext cx="3901320" cy="550080"/>
           </a:xfrm>
           <a:prstGeom prst="rect">
             <a:avLst/>
@@ -9006,7 +8938,7 @@
         <p:spPr>
           <a:xfrm>
             <a:off x="578160" y="4015080"/>
-            <a:ext cx="3901680" cy="794520"/>
+            <a:ext cx="3901320" cy="794160"/>
           </a:xfrm>
           <a:prstGeom prst="rect">
             <a:avLst/>
@@ -9068,7 +9000,7 @@
         <p:spPr>
           <a:xfrm>
             <a:off x="8519760" y="4831560"/>
-            <a:ext cx="484560" cy="226800"/>
+            <a:ext cx="484200" cy="226800"/>
           </a:xfrm>
           <a:prstGeom prst="rect">
             <a:avLst/>
@@ -9120,7 +9052,7 @@
         <p:spPr>
           <a:xfrm>
             <a:off x="493200" y="300600"/>
-            <a:ext cx="4078440" cy="842040"/>
+            <a:ext cx="4078080" cy="841680"/>
           </a:xfrm>
           <a:prstGeom prst="rect">
             <a:avLst/>
@@ -9149,7 +9081,11 @@
             </a:pPr>
             <a:r>
               <a:rPr b="0" lang="en-US" sz="1800" spc="-1" strike="noStrike">
-                <a:latin typeface="Arial"/>
+                <a:solidFill>
+                  <a:srgbClr val="000000"/>
+                </a:solidFill>
+                <a:latin typeface="Arial"/>
+                <a:ea typeface="DejaVu Sans"/>
               </a:rPr>
               <a:t>TITLE</a:t>
             </a:r>
@@ -9198,7 +9134,7 @@
         <p:spPr>
           <a:xfrm>
             <a:off x="479160" y="2886480"/>
-            <a:ext cx="365040" cy="359640"/>
+            <a:ext cx="364680" cy="359280"/>
           </a:xfrm>
           <a:prstGeom prst="roundRect">
             <a:avLst>
@@ -9228,7 +9164,7 @@
         <p:spPr>
           <a:xfrm>
             <a:off x="3440880" y="2886480"/>
-            <a:ext cx="365040" cy="359640"/>
+            <a:ext cx="364680" cy="359280"/>
           </a:xfrm>
           <a:prstGeom prst="roundRect">
             <a:avLst>
@@ -9258,7 +9194,7 @@
         <p:spPr>
           <a:xfrm>
             <a:off x="6402960" y="2886480"/>
-            <a:ext cx="365040" cy="359640"/>
+            <a:ext cx="364680" cy="359280"/>
           </a:xfrm>
           <a:prstGeom prst="roundRect">
             <a:avLst>
@@ -9288,7 +9224,7 @@
         <p:spPr>
           <a:xfrm>
             <a:off x="479160" y="2883600"/>
-            <a:ext cx="365040" cy="363960"/>
+            <a:ext cx="364680" cy="363960"/>
           </a:xfrm>
           <a:prstGeom prst="rect">
             <a:avLst/>
@@ -9340,7 +9276,7 @@
         <p:spPr>
           <a:xfrm>
             <a:off x="3440880" y="2883600"/>
-            <a:ext cx="365040" cy="363960"/>
+            <a:ext cx="364680" cy="363960"/>
           </a:xfrm>
           <a:prstGeom prst="rect">
             <a:avLst/>
@@ -9392,7 +9328,7 @@
         <p:spPr>
           <a:xfrm>
             <a:off x="6402960" y="2883600"/>
-            <a:ext cx="365040" cy="363960"/>
+            <a:ext cx="364680" cy="363960"/>
           </a:xfrm>
           <a:prstGeom prst="rect">
             <a:avLst/>
@@ -9444,7 +9380,7 @@
         <p:spPr>
           <a:xfrm>
             <a:off x="858960" y="2571840"/>
-            <a:ext cx="2354760" cy="713520"/>
+            <a:ext cx="2354400" cy="713160"/>
           </a:xfrm>
           <a:prstGeom prst="rect">
             <a:avLst/>
@@ -9506,7 +9442,7 @@
         <p:spPr>
           <a:xfrm>
             <a:off x="858960" y="3356280"/>
-            <a:ext cx="2354760" cy="1564920"/>
+            <a:ext cx="2354400" cy="1564560"/>
           </a:xfrm>
           <a:prstGeom prst="rect">
             <a:avLst/>
@@ -9568,7 +9504,7 @@
         <p:spPr>
           <a:xfrm>
             <a:off x="3821040" y="2571840"/>
-            <a:ext cx="2354760" cy="713520"/>
+            <a:ext cx="2354400" cy="713160"/>
           </a:xfrm>
           <a:prstGeom prst="rect">
             <a:avLst/>
@@ -9630,7 +9566,7 @@
         <p:spPr>
           <a:xfrm>
             <a:off x="3821040" y="3356280"/>
-            <a:ext cx="2354760" cy="1564920"/>
+            <a:ext cx="2354400" cy="1564560"/>
           </a:xfrm>
           <a:prstGeom prst="rect">
             <a:avLst/>
@@ -9692,7 +9628,7 @@
         <p:spPr>
           <a:xfrm>
             <a:off x="6782760" y="2571840"/>
-            <a:ext cx="2293920" cy="713520"/>
+            <a:ext cx="2293560" cy="713160"/>
           </a:xfrm>
           <a:prstGeom prst="rect">
             <a:avLst/>
@@ -9754,7 +9690,7 @@
         <p:spPr>
           <a:xfrm>
             <a:off x="6782760" y="3356280"/>
-            <a:ext cx="2293920" cy="1564920"/>
+            <a:ext cx="2293560" cy="1564560"/>
           </a:xfrm>
           <a:prstGeom prst="rect">
             <a:avLst/>
@@ -9816,7 +9752,7 @@
         <p:spPr>
           <a:xfrm>
             <a:off x="0" y="-478800"/>
-            <a:ext cx="9143280" cy="2327760"/>
+            <a:ext cx="9142920" cy="2327400"/>
           </a:xfrm>
           <a:prstGeom prst="roundRect">
             <a:avLst>
@@ -9880,7 +9816,7 @@
         <p:spPr>
           <a:xfrm>
             <a:off x="8519760" y="4831560"/>
-            <a:ext cx="484560" cy="226800"/>
+            <a:ext cx="484200" cy="226800"/>
           </a:xfrm>
           <a:prstGeom prst="rect">
             <a:avLst/>
@@ -9932,7 +9868,7 @@
         <p:spPr>
           <a:xfrm>
             <a:off x="228600" y="2057400"/>
-            <a:ext cx="8686440" cy="685440"/>
+            <a:ext cx="8686080" cy="685080"/>
           </a:xfrm>
           <a:prstGeom prst="rect">
             <a:avLst/>
@@ -9961,7 +9897,11 @@
             </a:pPr>
             <a:r>
               <a:rPr b="0" lang="en-US" sz="1800" spc="-1" strike="noStrike">
-                <a:latin typeface="Arial"/>
+                <a:solidFill>
+                  <a:srgbClr val="000000"/>
+                </a:solidFill>
+                <a:latin typeface="Arial"/>
+                <a:ea typeface="DejaVu Sans"/>
               </a:rPr>
               <a:t>TITLE</a:t>
             </a:r>
